--- a/Programacion II/Clases/Clase 14 - Preparacion de la presentacion final/Presentacion.pptx
+++ b/Programacion II/Clases/Clase 14 - Preparacion de la presentacion final/Presentacion.pptx
@@ -4512,7 +4512,7 @@
                 </a:solidFill>
                 <a:latin typeface="Calibri"/>
               </a:rPr>
-              <a:t>Entrega en ExamLab (examlab.lovable.app/app)</a:t>
+              <a:t>Entrega en ExamLab (https://examlab.lovable.app/)</a:t>
             </a:r>
             <a:r>
               <a:rPr sz="1600" b="0" i="0">
@@ -5116,7 +5116,7 @@
                 </a:solidFill>
                 <a:latin typeface="Calibri"/>
               </a:rPr>
-              <a:t>Entrega del taller en ExamLab (examlab.lovable.app/app) · domingo 23:59.</a:t>
+              <a:t>Entrega del taller en ExamLab (https://examlab.lovable.app/) · domingo 23:59.</a:t>
             </a:r>
           </a:p>
         </p:txBody>

--- a/Programacion II/Clases/Clase 14 - Preparacion de la presentacion final/Presentacion.pptx
+++ b/Programacion II/Clases/Clase 14 - Preparacion de la presentacion final/Presentacion.pptx
@@ -6816,22 +6816,6 @@
                 <a:latin typeface="Calibri"/>
               </a:rPr>
               <a:t>–   El manejo del tiempo y del nervio se entrena, no se improvisa</a:t>
-            </a:r>
-          </a:p>
-          <a:p>
-            <a:pPr>
-              <a:spcAft>
-                <a:spcPts val="800"/>
-              </a:spcAft>
-            </a:pPr>
-            <a:r>
-              <a:rPr sz="1500" b="0" i="0">
-                <a:solidFill>
-                  <a:srgbClr val="333333"/>
-                </a:solidFill>
-                <a:latin typeface="Calibri"/>
-              </a:rPr>
-              <a:t>–   Error tipico del docente que no domina el tema: dejar la sustentacion para el ultimo dia, decir 'preparen una…</a:t>
             </a:r>
           </a:p>
         </p:txBody>

--- a/Programacion II/Clases/Clase 14 - Preparacion de la presentacion final/Presentacion.pptx
+++ b/Programacion II/Clases/Clase 14 - Preparacion de la presentacion final/Presentacion.pptx
@@ -3783,7 +3783,7 @@
                 </a:solidFill>
                 <a:latin typeface="Calibri"/>
               </a:rPr>
-              <a:t>Si el computador no enciende cinco minutos antes de sustentar, ¿que muestra el equipo y quien lo tiene a la mano?</a:t>
+              <a:t>Si el computador no enciende cinco minutos antes de sustentar, ¿que muestra en su lugar y donde lo tiene a la mano?</a:t>
             </a:r>
           </a:p>
         </p:txBody>
@@ -4113,7 +4113,7 @@
                 </a:solidFill>
                 <a:latin typeface="Calibri"/>
               </a:rPr>
-              <a:t>Si el jurado pregunta 'donde esta la herencia en su proyecto', ¿en cuantos segundos pueden tener ese archivo en pantalla y quien responde?</a:t>
+              <a:t>Si el jurado pregunta 'donde esta la herencia en su proyecto', ¿en cuantos segundos puede tener ese archivo en pantalla?</a:t>
             </a:r>
           </a:p>
         </p:txBody>
@@ -4351,7 +4351,7 @@
                 </a:solidFill>
                 <a:latin typeface="Calibri"/>
               </a:rPr>
-              <a:t> Guion de sustentacion con bloques, responsable y minutos, mas la planilla de tiempos de dos ensayos y el video de respaldo de la ruta feliz, subido a ExamLab.</a:t>
+              <a:t> Guion de sustentacion con bloques, minutos y evidencia que se muestra (mas el responsable nominal solo si el docente autorizo equipo), mas la planilla de tiempos de dos ensayos y el video de respaldo de la ruta feliz, subido a ExamLab.</a:t>
             </a:r>
           </a:p>
           <a:p>
@@ -4385,7 +4385,7 @@
                 </a:solidFill>
                 <a:latin typeface="Calibri"/>
               </a:rPr>
-              <a:t> El guion escrito reparte los cinco bloques entre todos los integrantes, con responsable y minutos, y ningun integrante queda sin intervencion.</a:t>
+              <a:t> El guion escrito cubre los cinco bloques con minutos y evidencia, sin bloques huerfanos; si el docente autorizo equipo, todos los integrantes tienen bloque y ninguno queda sin intervencion.</a:t>
             </a:r>
           </a:p>
           <a:p>
@@ -5332,7 +5332,7 @@
                 </a:solidFill>
                 <a:latin typeface="Calibri"/>
               </a:rPr>
-              <a:t>Entregable: Guion de sustentacion con bloques, responsable y minutos, mas la planilla de tiempos de dos ensayos y el video de respaldo de la ruta feliz, subido a ExamLab.</a:t>
+              <a:t>Entregable: Guion de sustentacion con bloques, minutos y evidencia que se muestra (mas el responsable nominal solo si el docente autorizo equipo), mas la planilla de tiempos de dos ensayos y el video de respaldo de la ruta feliz, subido a ExamLab.</a:t>
             </a:r>
           </a:p>
           <a:p>
@@ -5663,7 +5663,7 @@
                 </a:solidFill>
                 <a:latin typeface="Calibri"/>
               </a:rPr>
-              <a:t> Guion de sustentacion con bloques, responsable y minutos, mas la planilla de tiempos de dos ensayos y el video de respaldo de la ruta feliz, subido a ExamLab.</a:t>
+              <a:t> Guion de sustentacion con bloques, minutos y evidencia que se muestra (mas el responsable nominal solo si el docente autorizo equipo), mas la planilla de tiempos de dos ensayos y el video de respaldo de la ruta feliz, subido a ExamLab.</a:t>
             </a:r>
           </a:p>
           <a:p>
@@ -6767,7 +6767,7 @@
                 </a:solidFill>
                 <a:latin typeface="Calibri"/>
               </a:rPr>
-              <a:t>–   La sustentacion es una coreografia de equipo y hay que repartirla como se reparte una obra de teatro</a:t>
+              <a:t>–   La sustentacion es una coreografia y hay que repartirla como se reparte una obra de teatro, aunque suba una sola…</a:t>
             </a:r>
           </a:p>
           <a:p>
@@ -8144,7 +8144,7 @@
                 </a:solidFill>
                 <a:latin typeface="Calibri"/>
               </a:rPr>
-              <a:t>–   Cada equipo llega con su VetCare compilando y corriendo, con las funciones de registrar dueno y mascota, agendar cita, buscar por ID y guardar en archivo ya terminadas.</a:t>
+              <a:t>–   Cada estudiante llega con su VetCare compilando y corriendo, con las funciones de registrar dueno y mascota, agendar cita, buscar por ID y guardar en archivo ya terminadas.</a:t>
             </a:r>
           </a:p>
           <a:p>
@@ -8176,7 +8176,7 @@
                 </a:solidFill>
                 <a:latin typeface="Calibri"/>
               </a:rPr>
-              <a:t>–   El salon tiene videobeam y un solo cable: cada equipo dispone de 8 minutos de reloj y una unica oportunidad de conectar, igual que el dia de la sustentacion.</a:t>
+              <a:t>–   El salon tiene videobeam y un solo cable: cada proyecto dispone de 8 minutos de reloj y una unica oportunidad de conectar, igual que el dia de la sustentacion.</a:t>
             </a:r>
           </a:p>
         </p:txBody>
@@ -8512,7 +8512,7 @@
                 </a:solidFill>
                 <a:latin typeface="Calibri"/>
               </a:rPr>
-              <a:t>Paso 1. Escriban el guion de la sustentacion en una tabla de cinco bloques con tres columnas: bloque, responsable y minutos planeados; el total debe sumar entre 5 y 7 minutos, dejando margen, y la demo en vivo debe ocupar por lo menos la mitad.</a:t>
+              <a:t>Paso 1. Escriban el guion de la sustentacion en una tabla de cinco bloques con tres columnas: bloque, minutos planeados y evidencia exacta que se muestra en pantalla (si el docente autorizo equipo, agreguen una cuarta columna con el responsable); el total debe sumar entre 5 y 7 minutos, dejando margen, y la demo en vivo debe ocupar por lo menos la mitad.</a:t>
             </a:r>
           </a:p>
         </p:txBody>
@@ -8822,7 +8822,7 @@
                 </a:solidFill>
                 <a:latin typeface="Calibri"/>
               </a:rPr>
-              <a:t>Paso 3. Hagan el ensayo numero uno con el cronometro del programa: cada integrante habla su bloque completo de pie, y al final anoten tiempo real contra tiempo planeado de cada bloque en la planilla.</a:t>
+              <a:t>Paso 3. Hagan el ensayo numero uno con el cronometro del programa: hablen cada bloque completo de pie y sin saltarse ninguno (si trabajan en equipo, cada integrante el suyo), y al final anoten tiempo real contra tiempo planeado de cada bloque en la planilla.</a:t>
             </a:r>
           </a:p>
         </p:txBody>
@@ -9132,7 +9132,7 @@
                 </a:solidFill>
                 <a:latin typeface="Calibri"/>
               </a:rPr>
-              <a:t>Paso 5. Intercambien con otro equipo una ronda de cinco preguntas de jurado, ajusten el guion con lo que fallo, hagan el ensayo numero dos y suban a ExamLab el guion, la planilla de tiempos de los dos ensayos y el video de respaldo.</a:t>
+              <a:t>Paso 5. Intercambien con otro compañero (o con otro equipo, si el docente lo autorizo) una ronda de cinco preguntas de jurado, ajusten el guion con lo que fallo, hagan el ensayo numero dos y suban a ExamLab el guion, la planilla de tiempos de los dos ensayos y el video de respaldo.</a:t>
             </a:r>
           </a:p>
         </p:txBody>

--- a/Programacion II/Clases/Clase 14 - Preparacion de la presentacion final/Presentacion.pptx
+++ b/Programacion II/Clases/Clase 14 - Preparacion de la presentacion final/Presentacion.pptx
@@ -4512,7 +4512,7 @@
                 </a:solidFill>
                 <a:latin typeface="Calibri"/>
               </a:rPr>
-              <a:t>Entrega en ExamLab (https://examlab.lovable.app/)</a:t>
+              <a:t>Entrega en ExamLab (https://uniaj.examlab.workers.dev/)</a:t>
             </a:r>
             <a:r>
               <a:rPr sz="1600" b="0" i="0">
@@ -5116,7 +5116,7 @@
                 </a:solidFill>
                 <a:latin typeface="Calibri"/>
               </a:rPr>
-              <a:t>Entrega del taller en ExamLab (https://examlab.lovable.app/) · domingo 23:59.</a:t>
+              <a:t>Entrega del taller en ExamLab (https://uniaj.examlab.workers.dev/) · domingo 23:59.</a:t>
             </a:r>
           </a:p>
         </p:txBody>

--- a/Programacion II/Clases/Clase 14 - Preparacion de la presentacion final/Presentacion.pptx
+++ b/Programacion II/Clases/Clase 14 - Preparacion de la presentacion final/Presentacion.pptx
@@ -8371,7 +8371,7 @@
         <p:spPr>
           <a:xfrm>
             <a:off x="457200" y="1234440"/>
-            <a:ext cx="11277295" cy="777240"/>
+            <a:ext cx="11277295" cy="950976"/>
           </a:xfrm>
           <a:prstGeom prst="roundRect">
             <a:avLst>
@@ -8415,7 +8415,7 @@
         </p:nvSpPr>
         <p:spPr>
           <a:xfrm>
-            <a:off x="594360" y="1403604"/>
+            <a:off x="594360" y="1490472"/>
             <a:ext cx="438912" cy="438912"/>
           </a:xfrm>
           <a:prstGeom prst="roundRect">
@@ -8460,7 +8460,7 @@
         </p:nvSpPr>
         <p:spPr>
           <a:xfrm>
-            <a:off x="594360" y="1403604"/>
+            <a:off x="594360" y="1490472"/>
             <a:ext cx="438912" cy="438912"/>
           </a:xfrm>
           <a:prstGeom prst="rect">
@@ -8494,7 +8494,7 @@
         <p:spPr>
           <a:xfrm>
             <a:off x="1188720" y="1325880"/>
-            <a:ext cx="10271455" cy="612647"/>
+            <a:ext cx="10271455" cy="786384"/>
           </a:xfrm>
           <a:prstGeom prst="rect">
             <a:avLst/>
@@ -8525,8 +8525,8 @@
         </p:nvSpPr>
         <p:spPr>
           <a:xfrm>
-            <a:off x="457200" y="2103120"/>
-            <a:ext cx="11277295" cy="777240"/>
+            <a:off x="457200" y="2276856"/>
+            <a:ext cx="11277295" cy="950976"/>
           </a:xfrm>
           <a:prstGeom prst="roundRect">
             <a:avLst>
@@ -8570,7 +8570,7 @@
         </p:nvSpPr>
         <p:spPr>
           <a:xfrm>
-            <a:off x="594360" y="2272284"/>
+            <a:off x="594360" y="2532888"/>
             <a:ext cx="438912" cy="438912"/>
           </a:xfrm>
           <a:prstGeom prst="roundRect">
@@ -8615,7 +8615,7 @@
         </p:nvSpPr>
         <p:spPr>
           <a:xfrm>
-            <a:off x="594360" y="2272284"/>
+            <a:off x="594360" y="2532888"/>
             <a:ext cx="438912" cy="438912"/>
           </a:xfrm>
           <a:prstGeom prst="rect">
@@ -8648,8 +8648,8 @@
         </p:nvSpPr>
         <p:spPr>
           <a:xfrm>
-            <a:off x="1188720" y="2194560"/>
-            <a:ext cx="10271455" cy="612647"/>
+            <a:off x="1188720" y="2368296"/>
+            <a:ext cx="10271455" cy="786384"/>
           </a:xfrm>
           <a:prstGeom prst="rect">
             <a:avLst/>
@@ -8680,8 +8680,8 @@
         </p:nvSpPr>
         <p:spPr>
           <a:xfrm>
-            <a:off x="457200" y="2971800"/>
-            <a:ext cx="11277295" cy="777240"/>
+            <a:off x="457200" y="3319272"/>
+            <a:ext cx="11277295" cy="950976"/>
           </a:xfrm>
           <a:prstGeom prst="roundRect">
             <a:avLst>
@@ -8725,7 +8725,7 @@
         </p:nvSpPr>
         <p:spPr>
           <a:xfrm>
-            <a:off x="594360" y="3140964"/>
+            <a:off x="594360" y="3575304"/>
             <a:ext cx="438912" cy="438912"/>
           </a:xfrm>
           <a:prstGeom prst="roundRect">
@@ -8770,7 +8770,7 @@
         </p:nvSpPr>
         <p:spPr>
           <a:xfrm>
-            <a:off x="594360" y="3140964"/>
+            <a:off x="594360" y="3575304"/>
             <a:ext cx="438912" cy="438912"/>
           </a:xfrm>
           <a:prstGeom prst="rect">
@@ -8803,8 +8803,8 @@
         </p:nvSpPr>
         <p:spPr>
           <a:xfrm>
-            <a:off x="1188720" y="3063240"/>
-            <a:ext cx="10271455" cy="612647"/>
+            <a:off x="1188720" y="3410712"/>
+            <a:ext cx="10271455" cy="786384"/>
           </a:xfrm>
           <a:prstGeom prst="rect">
             <a:avLst/>
@@ -8835,8 +8835,8 @@
         </p:nvSpPr>
         <p:spPr>
           <a:xfrm>
-            <a:off x="457200" y="3840479"/>
-            <a:ext cx="11277295" cy="777240"/>
+            <a:off x="457200" y="4361688"/>
+            <a:ext cx="11277295" cy="950976"/>
           </a:xfrm>
           <a:prstGeom prst="roundRect">
             <a:avLst>
@@ -8880,7 +8880,7 @@
         </p:nvSpPr>
         <p:spPr>
           <a:xfrm>
-            <a:off x="594360" y="4009643"/>
+            <a:off x="594360" y="4617720"/>
             <a:ext cx="438912" cy="438912"/>
           </a:xfrm>
           <a:prstGeom prst="roundRect">
@@ -8925,7 +8925,7 @@
         </p:nvSpPr>
         <p:spPr>
           <a:xfrm>
-            <a:off x="594360" y="4009643"/>
+            <a:off x="594360" y="4617720"/>
             <a:ext cx="438912" cy="438912"/>
           </a:xfrm>
           <a:prstGeom prst="rect">
@@ -8958,8 +8958,8 @@
         </p:nvSpPr>
         <p:spPr>
           <a:xfrm>
-            <a:off x="1188720" y="3931919"/>
-            <a:ext cx="10271455" cy="612647"/>
+            <a:off x="1188720" y="4453128"/>
+            <a:ext cx="10271455" cy="786384"/>
           </a:xfrm>
           <a:prstGeom prst="rect">
             <a:avLst/>
@@ -8990,8 +8990,8 @@
         </p:nvSpPr>
         <p:spPr>
           <a:xfrm>
-            <a:off x="457200" y="4709160"/>
-            <a:ext cx="11277295" cy="777240"/>
+            <a:off x="457200" y="5404104"/>
+            <a:ext cx="11277295" cy="950976"/>
           </a:xfrm>
           <a:prstGeom prst="roundRect">
             <a:avLst>
@@ -9035,7 +9035,7 @@
         </p:nvSpPr>
         <p:spPr>
           <a:xfrm>
-            <a:off x="594360" y="4878324"/>
+            <a:off x="594360" y="5660136"/>
             <a:ext cx="438912" cy="438912"/>
           </a:xfrm>
           <a:prstGeom prst="roundRect">
@@ -9080,7 +9080,7 @@
         </p:nvSpPr>
         <p:spPr>
           <a:xfrm>
-            <a:off x="594360" y="4878324"/>
+            <a:off x="594360" y="5660136"/>
             <a:ext cx="438912" cy="438912"/>
           </a:xfrm>
           <a:prstGeom prst="rect">
@@ -9113,8 +9113,8 @@
         </p:nvSpPr>
         <p:spPr>
           <a:xfrm>
-            <a:off x="1188720" y="4800600"/>
-            <a:ext cx="10271455" cy="612647"/>
+            <a:off x="1188720" y="5495544"/>
+            <a:ext cx="10271455" cy="786384"/>
           </a:xfrm>
           <a:prstGeom prst="rect">
             <a:avLst/>

--- a/Programacion II/Clases/Clase 14 - Preparacion de la presentacion final/Presentacion.pptx
+++ b/Programacion II/Clases/Clase 14 - Preparacion de la presentacion final/Presentacion.pptx
@@ -4327,7 +4327,7 @@
               </a:spcAft>
             </a:pPr>
             <a:r>
-              <a:rPr sz="1600" b="0" i="0">
+              <a:rPr sz="2000" b="0" i="0">
                 <a:solidFill>
                   <a:srgbClr val="333333"/>
                 </a:solidFill>
@@ -4336,7 +4336,7 @@
               <a:t>–   </a:t>
             </a:r>
             <a:r>
-              <a:rPr sz="1600" b="1" i="0">
+              <a:rPr sz="2000" b="1" i="0">
                 <a:solidFill>
                   <a:srgbClr val="333333"/>
                 </a:solidFill>
@@ -4345,7 +4345,7 @@
               <a:t>Entregable:</a:t>
             </a:r>
             <a:r>
-              <a:rPr sz="1600" b="0" i="0">
+              <a:rPr sz="2000" b="0" i="0">
                 <a:solidFill>
                   <a:srgbClr val="333333"/>
                 </a:solidFill>
@@ -4361,7 +4361,7 @@
               </a:spcAft>
             </a:pPr>
             <a:r>
-              <a:rPr sz="1600" b="0" i="0">
+              <a:rPr sz="2000" b="0" i="0">
                 <a:solidFill>
                   <a:srgbClr val="333333"/>
                 </a:solidFill>
@@ -4370,7 +4370,7 @@
               <a:t>–   </a:t>
             </a:r>
             <a:r>
-              <a:rPr sz="1600" b="1" i="0">
+              <a:rPr sz="2000" b="1" i="0">
                 <a:solidFill>
                   <a:srgbClr val="333333"/>
                 </a:solidFill>
@@ -4379,7 +4379,7 @@
               <a:t>Exito:</a:t>
             </a:r>
             <a:r>
-              <a:rPr sz="1600" b="0" i="0">
+              <a:rPr sz="2000" b="0" i="0">
                 <a:solidFill>
                   <a:srgbClr val="333333"/>
                 </a:solidFill>
@@ -4395,7 +4395,7 @@
               </a:spcAft>
             </a:pPr>
             <a:r>
-              <a:rPr sz="1600" b="0" i="0">
+              <a:rPr sz="2000" b="0" i="0">
                 <a:solidFill>
                   <a:srgbClr val="333333"/>
                 </a:solidFill>
@@ -4404,7 +4404,7 @@
               <a:t>–   </a:t>
             </a:r>
             <a:r>
-              <a:rPr sz="1600" b="1" i="0">
+              <a:rPr sz="2000" b="1" i="0">
                 <a:solidFill>
                   <a:srgbClr val="333333"/>
                 </a:solidFill>
@@ -4413,7 +4413,7 @@
               <a:t>Exito:</a:t>
             </a:r>
             <a:r>
-              <a:rPr sz="1600" b="0" i="0">
+              <a:rPr sz="2000" b="0" i="0">
                 <a:solidFill>
                   <a:srgbClr val="333333"/>
                 </a:solidFill>
@@ -4429,7 +4429,7 @@
               </a:spcAft>
             </a:pPr>
             <a:r>
-              <a:rPr sz="1600" b="0" i="0">
+              <a:rPr sz="2000" b="0" i="0">
                 <a:solidFill>
                   <a:srgbClr val="333333"/>
                 </a:solidFill>
@@ -4438,7 +4438,7 @@
               <a:t>–   </a:t>
             </a:r>
             <a:r>
-              <a:rPr sz="1600" b="1" i="0">
+              <a:rPr sz="2000" b="1" i="0">
                 <a:solidFill>
                   <a:srgbClr val="333333"/>
                 </a:solidFill>
@@ -4447,7 +4447,7 @@
               <a:t>Exito:</a:t>
             </a:r>
             <a:r>
-              <a:rPr sz="1600" b="0" i="0">
+              <a:rPr sz="2000" b="0" i="0">
                 <a:solidFill>
                   <a:srgbClr val="333333"/>
                 </a:solidFill>
@@ -4463,7 +4463,7 @@
               </a:spcAft>
             </a:pPr>
             <a:r>
-              <a:rPr sz="1600" b="0" i="0">
+              <a:rPr sz="2000" b="0" i="0">
                 <a:solidFill>
                   <a:srgbClr val="333333"/>
                 </a:solidFill>
@@ -4472,7 +4472,7 @@
               <a:t>–   </a:t>
             </a:r>
             <a:r>
-              <a:rPr sz="1600" b="1" i="0">
+              <a:rPr sz="2000" b="1" i="0">
                 <a:solidFill>
                   <a:srgbClr val="333333"/>
                 </a:solidFill>
@@ -4481,7 +4481,7 @@
               <a:t>Exito:</a:t>
             </a:r>
             <a:r>
-              <a:rPr sz="1600" b="0" i="0">
+              <a:rPr sz="2000" b="0" i="0">
                 <a:solidFill>
                   <a:srgbClr val="333333"/>
                 </a:solidFill>
@@ -4497,7 +4497,7 @@
               </a:spcAft>
             </a:pPr>
             <a:r>
-              <a:rPr sz="1600" b="0" i="0">
+              <a:rPr sz="2000" b="0" i="0">
                 <a:solidFill>
                   <a:srgbClr val="333333"/>
                 </a:solidFill>
@@ -4506,7 +4506,7 @@
               <a:t>–   </a:t>
             </a:r>
             <a:r>
-              <a:rPr sz="1600" b="1" i="0">
+              <a:rPr sz="2000" b="1" i="0">
                 <a:solidFill>
                   <a:srgbClr val="333333"/>
                 </a:solidFill>
@@ -4515,7 +4515,7 @@
               <a:t>Entrega en ExamLab (https://uniaj.examlab.workers.dev/)</a:t>
             </a:r>
             <a:r>
-              <a:rPr sz="1600" b="0" i="0">
+              <a:rPr sz="2000" b="0" i="0">
                 <a:solidFill>
                   <a:srgbClr val="333333"/>
                 </a:solidFill>
@@ -5562,7 +5562,7 @@
               </a:spcAft>
             </a:pPr>
             <a:r>
-              <a:rPr sz="1600" b="0" i="0">
+              <a:rPr sz="2000" b="0" i="0">
                 <a:solidFill>
                   <a:srgbClr val="333333"/>
                 </a:solidFill>
@@ -5571,7 +5571,7 @@
               <a:t>–   </a:t>
             </a:r>
             <a:r>
-              <a:rPr sz="1600" b="1" i="0">
+              <a:rPr sz="2000" b="1" i="0">
                 <a:solidFill>
                   <a:srgbClr val="333333"/>
                 </a:solidFill>
@@ -5580,7 +5580,7 @@
               <a:t>Hoy avanzamos VetCare en:</a:t>
             </a:r>
             <a:r>
-              <a:rPr sz="1600" b="0" i="0">
+              <a:rPr sz="2000" b="0" i="0">
                 <a:solidFill>
                   <a:srgbClr val="333333"/>
                 </a:solidFill>
@@ -5596,7 +5596,7 @@
               </a:spcAft>
             </a:pPr>
             <a:r>
-              <a:rPr sz="1600" b="0" i="0">
+              <a:rPr sz="2000" b="0" i="0">
                 <a:solidFill>
                   <a:srgbClr val="333333"/>
                 </a:solidFill>
@@ -5605,7 +5605,7 @@
               <a:t>–   Herramienta: </a:t>
             </a:r>
             <a:r>
-              <a:rPr sz="1600" b="1" i="0">
+              <a:rPr sz="2000" b="1" i="0">
                 <a:solidFill>
                   <a:srgbClr val="333333"/>
                 </a:solidFill>
@@ -5614,7 +5614,7 @@
               <a:t>Apache NetBeans</a:t>
             </a:r>
             <a:r>
-              <a:rPr sz="1600" b="0" i="0">
+              <a:rPr sz="2000" b="0" i="0">
                 <a:solidFill>
                   <a:srgbClr val="333333"/>
                 </a:solidFill>
@@ -5623,7 +5623,7 @@
               <a:t> · Bloque </a:t>
             </a:r>
             <a:r>
-              <a:rPr sz="1600" b="1" i="0">
+              <a:rPr sz="2000" b="1" i="0">
                 <a:solidFill>
                   <a:srgbClr val="333333"/>
                 </a:solidFill>
@@ -5639,7 +5639,7 @@
               </a:spcAft>
             </a:pPr>
             <a:r>
-              <a:rPr sz="1600" b="0" i="0">
+              <a:rPr sz="2000" b="0" i="0">
                 <a:solidFill>
                   <a:srgbClr val="333333"/>
                 </a:solidFill>
@@ -5648,7 +5648,7 @@
               <a:t>–   </a:t>
             </a:r>
             <a:r>
-              <a:rPr sz="1600" b="1" i="0">
+              <a:rPr sz="2000" b="1" i="0">
                 <a:solidFill>
                   <a:srgbClr val="333333"/>
                 </a:solidFill>
@@ -5657,7 +5657,7 @@
               <a:t>Entregable de hoy:</a:t>
             </a:r>
             <a:r>
-              <a:rPr sz="1600" b="0" i="0">
+              <a:rPr sz="2000" b="0" i="0">
                 <a:solidFill>
                   <a:srgbClr val="333333"/>
                 </a:solidFill>
@@ -5673,7 +5673,7 @@
               </a:spcAft>
             </a:pPr>
             <a:r>
-              <a:rPr sz="1600" b="0" i="0">
+              <a:rPr sz="2000" b="0" i="0">
                 <a:solidFill>
                   <a:srgbClr val="333333"/>
                 </a:solidFill>
@@ -5997,7 +5997,7 @@
         <p:spPr>
           <a:xfrm>
             <a:off x="502920" y="2587752"/>
-            <a:ext cx="2164019" cy="2560320"/>
+            <a:ext cx="2164019" cy="3310128"/>
           </a:xfrm>
           <a:prstGeom prst="rect">
             <a:avLst/>
@@ -6112,7 +6112,7 @@
         <p:spPr>
           <a:xfrm>
             <a:off x="2758379" y="2587752"/>
-            <a:ext cx="2164019" cy="2560320"/>
+            <a:ext cx="2164019" cy="3310128"/>
           </a:xfrm>
           <a:prstGeom prst="rect">
             <a:avLst/>
@@ -6227,7 +6227,7 @@
         <p:spPr>
           <a:xfrm>
             <a:off x="5013838" y="2587752"/>
-            <a:ext cx="2164019" cy="2560320"/>
+            <a:ext cx="2164019" cy="3310128"/>
           </a:xfrm>
           <a:prstGeom prst="rect">
             <a:avLst/>
@@ -6342,7 +6342,7 @@
         <p:spPr>
           <a:xfrm>
             <a:off x="7269297" y="2587752"/>
-            <a:ext cx="2164019" cy="2560320"/>
+            <a:ext cx="2164019" cy="3310128"/>
           </a:xfrm>
           <a:prstGeom prst="rect">
             <a:avLst/>
@@ -6457,7 +6457,7 @@
         <p:spPr>
           <a:xfrm>
             <a:off x="9524756" y="2587752"/>
-            <a:ext cx="2164019" cy="2560320"/>
+            <a:ext cx="2164019" cy="3310128"/>
           </a:xfrm>
           <a:prstGeom prst="rect">
             <a:avLst/>
@@ -6491,8 +6491,8 @@
         </p:nvSpPr>
         <p:spPr>
           <a:xfrm>
-            <a:off x="457200" y="5943600"/>
-            <a:ext cx="11277295" cy="365760"/>
+            <a:off x="457200" y="5806440"/>
+            <a:ext cx="11277295" cy="640080"/>
           </a:xfrm>
           <a:prstGeom prst="rect">
             <a:avLst/>
@@ -6745,7 +6745,7 @@
               </a:spcAft>
             </a:pPr>
             <a:r>
-              <a:rPr sz="1500" b="0" i="0">
+              <a:rPr sz="2000" b="0" i="0">
                 <a:solidFill>
                   <a:srgbClr val="333333"/>
                 </a:solidFill>
@@ -6761,7 +6761,7 @@
               </a:spcAft>
             </a:pPr>
             <a:r>
-              <a:rPr sz="1500" b="0" i="0">
+              <a:rPr sz="2000" b="0" i="0">
                 <a:solidFill>
                   <a:srgbClr val="333333"/>
                 </a:solidFill>
@@ -6777,7 +6777,7 @@
               </a:spcAft>
             </a:pPr>
             <a:r>
-              <a:rPr sz="1500" b="0" i="0">
+              <a:rPr sz="2000" b="0" i="0">
                 <a:solidFill>
                   <a:srgbClr val="333333"/>
                 </a:solidFill>
@@ -6793,7 +6793,7 @@
               </a:spcAft>
             </a:pPr>
             <a:r>
-              <a:rPr sz="1500" b="0" i="0">
+              <a:rPr sz="2000" b="0" i="0">
                 <a:solidFill>
                   <a:srgbClr val="333333"/>
                 </a:solidFill>
@@ -6809,7 +6809,7 @@
               </a:spcAft>
             </a:pPr>
             <a:r>
-              <a:rPr sz="1500" b="0" i="0">
+              <a:rPr sz="2000" b="0" i="0">
                 <a:solidFill>
                   <a:srgbClr val="333333"/>
                 </a:solidFill>
@@ -7580,7 +7580,7 @@
               </a:spcAft>
             </a:pPr>
             <a:r>
-              <a:rPr sz="1600" b="0" i="0">
+              <a:rPr sz="2000" b="0" i="0">
                 <a:solidFill>
                   <a:srgbClr val="333333"/>
                 </a:solidFill>
@@ -7589,7 +7589,7 @@
               <a:t>–   </a:t>
             </a:r>
             <a:r>
-              <a:rPr sz="1600" b="1" i="0">
+              <a:rPr sz="2000" b="1" i="0">
                 <a:solidFill>
                   <a:srgbClr val="333333"/>
                 </a:solidFill>
@@ -7598,7 +7598,7 @@
               <a:t>Herramienta:</a:t>
             </a:r>
             <a:r>
-              <a:rPr sz="1600" b="0" i="0">
+              <a:rPr sz="2000" b="0" i="0">
                 <a:solidFill>
                   <a:srgbClr val="333333"/>
                 </a:solidFill>
@@ -7614,7 +7614,7 @@
               </a:spcAft>
             </a:pPr>
             <a:r>
-              <a:rPr sz="1600" b="0" i="0">
+              <a:rPr sz="2000" b="0" i="0">
                 <a:solidFill>
                   <a:srgbClr val="333333"/>
                 </a:solidFill>
@@ -7623,7 +7623,7 @@
               <a:t>–   </a:t>
             </a:r>
             <a:r>
-              <a:rPr sz="1600" b="1" i="0">
+              <a:rPr sz="2000" b="1" i="0">
                 <a:solidFill>
                   <a:srgbClr val="333333"/>
                 </a:solidFill>
@@ -7632,7 +7632,7 @@
               <a:t>Demo:</a:t>
             </a:r>
             <a:r>
-              <a:rPr sz="1600" b="0" i="0">
+              <a:rPr sz="2000" b="0" i="0">
                 <a:solidFill>
                   <a:srgbClr val="333333"/>
                 </a:solidFill>
@@ -7648,7 +7648,7 @@
               </a:spcAft>
             </a:pPr>
             <a:r>
-              <a:rPr sz="1600" b="0" i="0">
+              <a:rPr sz="2000" b="0" i="0">
                 <a:solidFill>
                   <a:srgbClr val="333333"/>
                 </a:solidFill>
@@ -7868,7 +7868,7 @@
               </a:spcAft>
             </a:pPr>
             <a:r>
-              <a:rPr sz="1600" b="0" i="0">
+              <a:rPr sz="2000" b="0" i="0">
                 <a:solidFill>
                   <a:srgbClr val="333333"/>
                 </a:solidFill>
@@ -7877,7 +7877,7 @@
               <a:t>–   </a:t>
             </a:r>
             <a:r>
-              <a:rPr sz="1600" b="1" i="0">
+              <a:rPr sz="2000" b="1" i="0">
                 <a:solidFill>
                   <a:srgbClr val="333333"/>
                 </a:solidFill>
@@ -7886,7 +7886,7 @@
               <a:t>Por que importa al PI:</a:t>
             </a:r>
             <a:r>
-              <a:rPr sz="1600" b="0" i="0">
+              <a:rPr sz="2000" b="0" i="0">
                 <a:solidFill>
                   <a:srgbClr val="333333"/>
                 </a:solidFill>
@@ -7902,7 +7902,7 @@
               </a:spcAft>
             </a:pPr>
             <a:r>
-              <a:rPr sz="1600" b="0" i="0">
+              <a:rPr sz="2000" b="0" i="0">
                 <a:solidFill>
                   <a:srgbClr val="333333"/>
                 </a:solidFill>
@@ -7918,7 +7918,7 @@
               </a:spcAft>
             </a:pPr>
             <a:r>
-              <a:rPr sz="1600" b="0" i="0">
+              <a:rPr sz="2000" b="0" i="0">
                 <a:solidFill>
                   <a:srgbClr val="333333"/>
                 </a:solidFill>
@@ -8138,7 +8138,7 @@
               </a:spcAft>
             </a:pPr>
             <a:r>
-              <a:rPr sz="1600" b="0" i="0">
+              <a:rPr sz="2000" b="0" i="0">
                 <a:solidFill>
                   <a:srgbClr val="333333"/>
                 </a:solidFill>
@@ -8154,7 +8154,7 @@
               </a:spcAft>
             </a:pPr>
             <a:r>
-              <a:rPr sz="1600" b="0" i="0">
+              <a:rPr sz="2000" b="0" i="0">
                 <a:solidFill>
                   <a:srgbClr val="333333"/>
                 </a:solidFill>
@@ -8170,7 +8170,7 @@
               </a:spcAft>
             </a:pPr>
             <a:r>
-              <a:rPr sz="1600" b="0" i="0">
+              <a:rPr sz="2000" b="0" i="0">
                 <a:solidFill>
                   <a:srgbClr val="333333"/>
                 </a:solidFill>
@@ -8506,7 +8506,7 @@
           <a:lstStyle/>
           <a:p>
             <a:r>
-              <a:rPr sz="1500" b="1" i="0">
+              <a:rPr sz="1400" b="1" i="0">
                 <a:solidFill>
                   <a:srgbClr val="095292"/>
                 </a:solidFill>
@@ -8816,7 +8816,7 @@
           <a:lstStyle/>
           <a:p>
             <a:r>
-              <a:rPr sz="1500" b="1" i="0">
+              <a:rPr sz="1400" b="1" i="0">
                 <a:solidFill>
                   <a:srgbClr val="095292"/>
                 </a:solidFill>
@@ -8971,7 +8971,7 @@
           <a:lstStyle/>
           <a:p>
             <a:r>
-              <a:rPr sz="1500" b="1" i="0">
+              <a:rPr sz="1400" b="1" i="0">
                 <a:solidFill>
                   <a:srgbClr val="095292"/>
                 </a:solidFill>
@@ -9126,7 +9126,7 @@
           <a:lstStyle/>
           <a:p>
             <a:r>
-              <a:rPr sz="1500" b="1" i="0">
+              <a:rPr sz="1400" b="1" i="0">
                 <a:solidFill>
                   <a:srgbClr val="095292"/>
                 </a:solidFill>

--- a/Programacion II/Clases/Clase 14 - Preparacion de la presentacion final/Presentacion.pptx
+++ b/Programacion II/Clases/Clase 14 - Preparacion de la presentacion final/Presentacion.pptx
@@ -4351,7 +4351,7 @@
                 </a:solidFill>
                 <a:latin typeface="Calibri"/>
               </a:rPr>
-              <a:t> Guion de sustentacion con bloques, minutos y evidencia que se muestra (mas el responsable nominal solo si el docente autorizo equipo), mas la planilla de tiempos de dos ensayos y el video de respaldo de la ruta feliz, subido a ExamLab.</a:t>
+              <a:t> Guion de sustentacion con bloques, minutos y evidencia que se muestra (mas el responsable nominal solo si el docente autorizo equipo), mas la planilla de tiempos de dos ensayos y el video de respaldo de la ruta feliz, subido a la plataforma del curso.</a:t>
             </a:r>
           </a:p>
           <a:p>
@@ -4512,7 +4512,7 @@
                 </a:solidFill>
                 <a:latin typeface="Calibri"/>
               </a:rPr>
-              <a:t>Entrega en ExamLab (https://uniaj.examlab.workers.dev/)</a:t>
+              <a:t>Entrega en la plataforma del curso</a:t>
             </a:r>
             <a:r>
               <a:rPr sz="2000" b="0" i="0">
@@ -4521,7 +4521,7 @@
                 </a:solidFill>
                 <a:latin typeface="Calibri"/>
               </a:rPr>
-              <a:t> — domingo 23:59.</a:t>
+              <a:t> — en la fecha que indique el docente.</a:t>
             </a:r>
           </a:p>
         </p:txBody>
@@ -5116,7 +5116,7 @@
                 </a:solidFill>
                 <a:latin typeface="Calibri"/>
               </a:rPr>
-              <a:t>Entrega del taller en ExamLab (https://uniaj.examlab.workers.dev/) · domingo 23:59.</a:t>
+              <a:t>Entrega del taller, si el docente lo asigna · en la fecha que indique el docente.</a:t>
             </a:r>
           </a:p>
         </p:txBody>
@@ -5332,7 +5332,7 @@
                 </a:solidFill>
                 <a:latin typeface="Calibri"/>
               </a:rPr>
-              <a:t>Entregable: Guion de sustentacion con bloques, minutos y evidencia que se muestra (mas el responsable nominal solo si el docente autorizo equipo), mas la planilla de tiempos de dos ensayos y el video de respaldo de la ruta feliz, subido a ExamLab.</a:t>
+              <a:t>Entregable: Guion de sustentacion con bloques, minutos y evidencia que se muestra (mas el responsable nominal solo si el docente autorizo equipo), mas la planilla de tiempos de dos ensayos y el video de respaldo de la ruta feliz, subido a la plataforma del curso.</a:t>
             </a:r>
           </a:p>
           <a:p>
@@ -5611,7 +5611,7 @@
                 </a:solidFill>
                 <a:latin typeface="Calibri"/>
               </a:rPr>
-              <a:t>Apache NetBeans</a:t>
+              <a:t>Visual Studio Code (Java)</a:t>
             </a:r>
             <a:r>
               <a:rPr sz="2000" b="0" i="0">
@@ -5663,7 +5663,7 @@
                 </a:solidFill>
                 <a:latin typeface="Calibri"/>
               </a:rPr>
-              <a:t> Guion de sustentacion con bloques, minutos y evidencia que se muestra (mas el responsable nominal solo si el docente autorizo equipo), mas la planilla de tiempos de dos ensayos y el video de respaldo de la ruta feliz, subido a ExamLab.</a:t>
+              <a:t> Guion de sustentacion con bloques, minutos y evidencia que se muestra (mas el responsable nominal solo si el docente autorizo equipo), mas la planilla de tiempos de dos ensayos y el video de respaldo de la ruta feliz, subido a la plataforma del curso.</a:t>
             </a:r>
           </a:p>
           <a:p>
@@ -7203,7 +7203,7 @@
                 </a:solidFill>
                 <a:latin typeface="Calibri"/>
               </a:rPr>
-              <a:t>    for (String ruta : requeridos) {</a:t>
+              <a:t>    for (String ruta: requeridos) {</a:t>
             </a:r>
           </a:p>
           <a:p>
@@ -7235,7 +7235,7 @@
                 </a:solidFill>
                 <a:latin typeface="Calibri"/>
               </a:rPr>
-              <a:t>        System.out.println((filas &gt; 0 ? "[OK]    " : "[FALLA] ") + ruta + " -&gt; " + filas + " filas");</a:t>
+              <a:t>        System.out.println((filas &gt; 0 ? "[OK]    ": "[FALLA] ") + ruta + " -&gt; " + filas + " filas");</a:t>
             </a:r>
           </a:p>
           <a:p>
@@ -7604,7 +7604,7 @@
                 </a:solidFill>
                 <a:latin typeface="Calibri"/>
               </a:rPr>
-              <a:t> Apache NetBeans</a:t>
+              <a:t> Visual Studio Code (Java)</a:t>
             </a:r>
           </a:p>
           <a:p>
@@ -9132,7 +9132,7 @@
                 </a:solidFill>
                 <a:latin typeface="Calibri"/>
               </a:rPr>
-              <a:t>Paso 5. Intercambien con otro compañero (o con otro equipo, si el docente lo autorizo) una ronda de cinco preguntas de jurado, ajusten el guion con lo que fallo, hagan el ensayo numero dos y suban a ExamLab el guion, la planilla de tiempos de los dos ensayos y el video de respaldo.</a:t>
+              <a:t>Paso 5. Intercambien con otro compañero (o con otro equipo, si el docente lo autorizo) una ronda de cinco preguntas de jurado, ajusten el guion con lo que fallo, hagan el ensayo numero dos y suban a la plataforma del curso el guion, la planilla de tiempos de los dos ensayos y el video de respaldo.</a:t>
             </a:r>
           </a:p>
         </p:txBody>
